--- a/docs/reviews/zeroth-review/Predictive_BMS_Zeroth_Review.pptx
+++ b/docs/reviews/zeroth-review/Predictive_BMS_Zeroth_Review.pptx
@@ -1261,17 +1261,17 @@
           </a:p>
           <a:p>
             <a:r>
-              <a:t>known open problem. The third is the closest work to mine and is where the one</a:t>
-            </a:r>
-          </a:p>
-          <a:p>
-            <a:r>
-              <a:t>degree per second figure comes from. The last is the standard my design is aimed</a:t>
-            </a:r>
-          </a:p>
-          <a:p>
-            <a:r>
-              <a:t>at, although I am not claiming certification.</a:t>
+              <a:t>known open problem. The third is the closest work to mine: it gives an early</a:t>
+            </a:r>
+          </a:p>
+          <a:p>
+            <a:r>
+              <a:t>warning, but it needs training data and fitted models. The last is the standard</a:t>
+            </a:r>
+          </a:p>
+          <a:p>
+            <a:r>
+              <a:t>my design is aimed at, although I am not claiming certification.</a:t>
             </a:r>
           </a:p>
         </p:txBody>
@@ -8661,7 +8661,7 @@
                           </a:solidFill>
                           <a:latin typeface="Times New Roman"/>
                         </a:rPr>
-                        <a:t>A warning method that acts when the temperature rise reaches 1 °C per second.</a:t>
+                        <a:t>A warning method that combines data clustering with a heat model, and warns 25 minutes before thermal runaway.</a:t>
                       </a:r>
                     </a:p>
                   </a:txBody>
@@ -9029,7 +9029,7 @@
                 </a:solidFill>
                 <a:latin typeface="Times New Roman"/>
               </a:rPr>
-              <a:t>X. Zhang, S. Chen, J. Zhu et al., “A critical review of thermal runaway prediction and early-warning methods for lithium-ion batteries,” Energy Material Advances, vol. 4, art. 0008, 2023.</a:t>
+              <a:t>X. Zhang, S. Chen, J. Zhu and Y. Gao, “A critical review of thermal runaway prediction and early-warning methods for lithium-ion batteries,” Energy Material Advances, vol. 4, art. 0008, 2023.</a:t>
             </a:r>
           </a:p>
           <a:p>
@@ -9087,7 +9087,7 @@
                 </a:solidFill>
                 <a:latin typeface="Times New Roman"/>
               </a:rPr>
-              <a:t>A. K. M. A. Habib, M. K. Hasan, G. F. Issa, D. Singh, S. Islam and T. M. Ghazal, “Lithium-ion battery management system for electric vehicles: Constraints, challenges and recommendations,” Batteries, vol. 9, no. 3, art. 152, 2023.</a:t>
+              <a:t>A. K. M. A. Habib, M. K. Hasan, G. F. Issa, D. Singh, S. Islam and T. M. Ghazal, “Lithium-ion battery management system for electric vehicles: Constraints, challenges, and recommendations,” Batteries, vol. 9, no. 3, art. 152, 2023.</a:t>
             </a:r>
           </a:p>
           <a:p>

--- a/docs/reviews/zeroth-review/Predictive_BMS_Zeroth_Review.pptx
+++ b/docs/reviews/zeroth-review/Predictive_BMS_Zeroth_Review.pptx
@@ -4646,7 +4646,7 @@
                 </a:solidFill>
                 <a:latin typeface="Times New Roman"/>
               </a:rPr>
-              <a:t>Roll No.  :  ____________</a:t>
+              <a:t>Roll No.  :  23WH1A0208</a:t>
             </a:r>
           </a:p>
         </p:txBody>
@@ -4702,7 +4702,7 @@
                 </a:solidFill>
                 <a:latin typeface="Times New Roman"/>
               </a:rPr>
-              <a:t>Rupesh</a:t>
+              <a:t>Dr. M. Rupesh</a:t>
             </a:r>
           </a:p>
           <a:p>
@@ -4713,7 +4713,18 @@
                 </a:solidFill>
                 <a:latin typeface="Times New Roman"/>
               </a:rPr>
-              <a:t>Department of EEE</a:t>
+              <a:t>Associate Professor</a:t>
+            </a:r>
+          </a:p>
+          <a:p>
+            <a:r>
+              <a:rPr sz="1800" b="0" i="0" u="none">
+                <a:solidFill>
+                  <a:srgbClr val="000000"/>
+                </a:solidFill>
+                <a:latin typeface="Times New Roman"/>
+              </a:rPr>
+              <a:t>EEE Department</a:t>
             </a:r>
           </a:p>
           <a:p>

--- a/docs/reviews/zeroth-review/Predictive_BMS_Zeroth_Review.pptx
+++ b/docs/reviews/zeroth-review/Predictive_BMS_Zeroth_Review.pptx
@@ -7682,7 +7682,7 @@
                           </a:solidFill>
                           <a:latin typeface="Times New Roman"/>
                         </a:rPr>
-                        <a:t>Siemens NX</a:t>
+                        <a:t>FreeCAD</a:t>
                       </a:r>
                     </a:p>
                   </a:txBody>
